--- a/presentation/Tracks 1 and 2 combined.pptx
+++ b/presentation/Tracks 1 and 2 combined.pptx
@@ -1,36 +1,35 @@
 
 <file path=ppt/presentation.xml><?xml version="1.0" encoding="utf-8"?>
-<p:presentation xmlns:p="http://schemas.openxmlformats.org/presentationml/2006/main">
+<p:presentation xmlns:p="http://schemas.openxmlformats.org/presentationml/2006/main" xmlns:r="http://schemas.openxmlformats.org/officeDocument/2006/relationships">
   <p:sldMasterIdLst>
-    <p:sldMasterId xmlns:r="http://schemas.openxmlformats.org/officeDocument/2006/relationships" id="2147483648" r:id="R5650afaa1fac427a"/>
+    <p:sldMasterId id="2147483648" r:id="R5650afaa1fac427a"/>
   </p:sldMasterIdLst>
   <p:notesMasterIdLst>
-    <p:notesMasterId xmlns:r="http://schemas.openxmlformats.org/officeDocument/2006/relationships" r:id="R4cec176447124455"/>
+    <p:notesMasterId r:id="R4cec176447124455"/>
   </p:notesMasterIdLst>
   <p:sldIdLst>
-    <p:sldId xmlns:r="http://schemas.openxmlformats.org/officeDocument/2006/relationships" id="256" r:id="R6644a5e0abdd4993"/>
-    <p:sldId xmlns:r="http://schemas.openxmlformats.org/officeDocument/2006/relationships" id="257" r:id="R2b49de4ed3974336"/>
-    <p:sldId xmlns:r="http://schemas.openxmlformats.org/officeDocument/2006/relationships" id="258" r:id="R222ab5b821464866"/>
-    <p:sldId xmlns:r="http://schemas.openxmlformats.org/officeDocument/2006/relationships" id="259" r:id="Rc1ff0d8c6f6c4141"/>
-    <p:sldId xmlns:r="http://schemas.openxmlformats.org/officeDocument/2006/relationships" id="260" r:id="Re2876851bf224e3a"/>
-    <p:sldId xmlns:r="http://schemas.openxmlformats.org/officeDocument/2006/relationships" id="261" r:id="R408fc55328c24fd7"/>
-    <p:sldId xmlns:r="http://schemas.openxmlformats.org/officeDocument/2006/relationships" id="262" r:id="Rda98bba712c84a4e"/>
-    <p:sldId xmlns:r="http://schemas.openxmlformats.org/officeDocument/2006/relationships" id="263" r:id="R0b250530cbc84e7b"/>
-    <p:sldId xmlns:r="http://schemas.openxmlformats.org/officeDocument/2006/relationships" id="264" r:id="R00b482d1d9f8439a"/>
-    <p:sldId xmlns:r="http://schemas.openxmlformats.org/officeDocument/2006/relationships" id="265" r:id="R63d7ace361274741"/>
-    <p:sldId xmlns:r="http://schemas.openxmlformats.org/officeDocument/2006/relationships" id="266" r:id="R92cfed7235b14214"/>
-    <p:sldId xmlns:r="http://schemas.openxmlformats.org/officeDocument/2006/relationships" id="267" r:id="R6859061ee45f4025"/>
-    <p:sldId xmlns:r="http://schemas.openxmlformats.org/officeDocument/2006/relationships" id="268" r:id="Rcf0e768a4c3e4e41"/>
-    <p:sldId xmlns:r="http://schemas.openxmlformats.org/officeDocument/2006/relationships" id="269" r:id="Re7267bb30ce34528"/>
-    <p:sldId xmlns:r="http://schemas.openxmlformats.org/officeDocument/2006/relationships" id="270" r:id="Rd7b4f6ae91ae4524"/>
-    <p:sldId xmlns:r="http://schemas.openxmlformats.org/officeDocument/2006/relationships" id="271" r:id="R4e18e13261ed47bd"/>
-    <p:sldId xmlns:r="http://schemas.openxmlformats.org/officeDocument/2006/relationships" id="272" r:id="R0ef1acb4198049a8"/>
-    <p:sldId xmlns:r="http://schemas.openxmlformats.org/officeDocument/2006/relationships" id="273" r:id="R994c6c4e82374561"/>
-    <p:sldId xmlns:r="http://schemas.openxmlformats.org/officeDocument/2006/relationships" id="274" r:id="Rffcb880c000c4bfc"/>
-    <p:sldId xmlns:r="http://schemas.openxmlformats.org/officeDocument/2006/relationships" id="275" r:id="Re8d503f2fa254849"/>
-    <p:sldId xmlns:r="http://schemas.openxmlformats.org/officeDocument/2006/relationships" id="276" r:id="R38bd92a6652641e2"/>
-    <p:sldId xmlns:r="http://schemas.openxmlformats.org/officeDocument/2006/relationships" id="277" r:id="R43f1c12f466a4d45"/>
-    <p:sldId xmlns:r="http://schemas.openxmlformats.org/officeDocument/2006/relationships" id="278" r:id="Rf68c7c6fb3ab4bd1"/>
+    <p:sldId id="256" r:id="R6644a5e0abdd4993"/>
+    <p:sldId id="257" r:id="R2b49de4ed3974336"/>
+    <p:sldId id="258" r:id="R222ab5b821464866"/>
+    <p:sldId id="259" r:id="Rc1ff0d8c6f6c4141"/>
+    <p:sldId id="260" r:id="Re2876851bf224e3a"/>
+    <p:sldId id="261" r:id="R408fc55328c24fd7"/>
+    <p:sldId id="262" r:id="Rda98bba712c84a4e"/>
+    <p:sldId id="263" r:id="R0b250530cbc84e7b"/>
+    <p:sldId id="264" r:id="R00b482d1d9f8439a"/>
+    <p:sldId id="265" r:id="R63d7ace361274741"/>
+    <p:sldId id="266" r:id="R92cfed7235b14214"/>
+    <p:sldId id="267" r:id="R6859061ee45f4025"/>
+    <p:sldId id="268" r:id="Rcf0e768a4c3e4e41"/>
+    <p:sldId id="269" r:id="Re7267bb30ce34528"/>
+    <p:sldId id="270" r:id="Rd7b4f6ae91ae4524"/>
+    <p:sldId id="271" r:id="R4e18e13261ed47bd"/>
+    <p:sldId id="272" r:id="R0ef1acb4198049a8"/>
+    <p:sldId id="273" r:id="R994c6c4e82374561"/>
+    <p:sldId id="274" r:id="Rffcb880c000c4bfc"/>
+    <p:sldId id="275" r:id="Re8d503f2fa254849"/>
+    <p:sldId id="276" r:id="R38bd92a6652641e2"/>
+    <p:sldId id="277" r:id="R43f1c12f466a4d45"/>
   </p:sldIdLst>
   <p:sldSz cx="12192000" cy="6858000"/>
   <p:notesSz cx="6858000" cy="9144000"/>
@@ -1474,76 +1473,6 @@
 </p:notes>
 </file>
 
-<file path=ppt/notesSlides/notesSlide23.xml><?xml version="1.0" encoding="utf-8"?>
-<p:notes xmlns:p="http://schemas.openxmlformats.org/presentationml/2006/main">
-  <p:cSld>
-    <p:spTree>
-      <p:nvGrpSpPr>
-        <p:cNvPr id="1" name=""/>
-        <p:cNvGrpSpPr/>
-        <p:nvPr/>
-      </p:nvGrpSpPr>
-      <p:grpSpPr>
-        <a:xfrm xmlns:a="http://schemas.openxmlformats.org/drawingml/2006/main"/>
-      </p:grpSpPr>
-      <p:sp>
-        <p:nvSpPr>
-          <p:cNvPr id="2" name="Slide Image Placeholder 1"/>
-          <p:cNvSpPr>
-            <a:spLocks xmlns:a="http://schemas.openxmlformats.org/drawingml/2006/main" noGrp="1"/>
-          </p:cNvSpPr>
-          <p:nvPr>
-            <p:ph type="sldImg" idx="0"/>
-          </p:nvPr>
-        </p:nvSpPr>
-        <p:spPr/>
-      </p:sp>
-      <p:sp>
-        <p:nvSpPr>
-          <p:cNvPr id="3" name="Notes Placeholder 2"/>
-          <p:cNvSpPr>
-            <a:spLocks xmlns:a="http://schemas.openxmlformats.org/drawingml/2006/main" noGrp="1"/>
-          </p:cNvSpPr>
-          <p:nvPr>
-            <p:ph type="body" idx="1"/>
-          </p:nvPr>
-        </p:nvSpPr>
-        <p:spPr/>
-        <p:txBody>
-          <a:bodyPr xmlns:a="http://schemas.openxmlformats.org/drawingml/2006/main"/>
-          <a:lstStyle xmlns:a="http://schemas.openxmlformats.org/drawingml/2006/main"/>
-          <a:p xmlns:a="http://schemas.openxmlformats.org/drawingml/2006/main">
-            <a:r>
-              <a:t>Keep answers precise: the scores describe output distributions, the zero syndrome is not a proof of no error, and the span result is exploratory.</a:t>
-            </a:r>
-          </a:p>
-        </p:txBody>
-      </p:sp>
-      <p:sp>
-        <p:nvSpPr>
-          <p:cNvPr id="4" name="Slide Number Placeholder 3"/>
-          <p:cNvSpPr>
-            <a:spLocks xmlns:a="http://schemas.openxmlformats.org/drawingml/2006/main" noGrp="1"/>
-          </p:cNvSpPr>
-          <p:nvPr>
-            <p:ph type="sldNum" idx="5"/>
-          </p:nvPr>
-        </p:nvSpPr>
-        <p:spPr/>
-        <p:txBody>
-          <a:bodyPr xmlns:a="http://schemas.openxmlformats.org/drawingml/2006/main"/>
-          <a:lstStyle xmlns:a="http://schemas.openxmlformats.org/drawingml/2006/main"/>
-          <a:p xmlns:a="http://schemas.openxmlformats.org/drawingml/2006/main"/>
-        </p:txBody>
-      </p:sp>
-    </p:spTree>
-  </p:cSld>
-  <p:clrMapOvr>
-    <a:masterClrMapping xmlns:a="http://schemas.openxmlformats.org/drawingml/2006/main"/>
-  </p:clrMapOvr>
-</p:notes>
-</file>
-
 <file path=ppt/notesSlides/notesSlide3.xml><?xml version="1.0" encoding="utf-8"?>
 <p:notes xmlns:p="http://schemas.openxmlformats.org/presentationml/2006/main">
   <p:cSld>
@@ -28728,1943 +28657,6 @@
 </p:sld>
 </file>
 
-<file path=ppt/slides/slide23.xml><?xml version="1.0" encoding="utf-8"?>
-<p:sld xmlns:p="http://schemas.openxmlformats.org/presentationml/2006/main">
-  <p:cSld>
-    <p:bg>
-      <p:bgPr>
-        <a:solidFill xmlns:a="http://schemas.openxmlformats.org/drawingml/2006/main">
-          <a:srgbClr val="FFFFFF"/>
-        </a:solidFill>
-      </p:bgPr>
-    </p:bg>
-    <p:spTree>
-      <p:nvGrpSpPr>
-        <p:cNvPr id="1" name=""/>
-        <p:cNvGrpSpPr/>
-        <p:nvPr/>
-      </p:nvGrpSpPr>
-      <p:grpSpPr>
-        <a:xfrm xmlns:a="http://schemas.openxmlformats.org/drawingml/2006/main"/>
-      </p:grpSpPr>
-      <p:sp>
-        <p:nvSpPr>
-          <p:cNvPr id="13" name="">
-            <a:extLst xmlns:a="http://schemas.openxmlformats.org/drawingml/2006/main">
-              <a:ext uri="{FF2B5EF4-FFF2-40B4-BE49-F238E27FC236}">
-                <a16:creationId xmlns:a16="http://schemas.microsoft.com/office/drawing/2014/main" id="{17427168-17CA-4038-8DE8-8BC737ADF6DB}"/>
-              </a:ext>
-            </a:extLst>
-          </p:cNvPr>
-          <p:cNvSpPr>
-            <a:spLocks xmlns:a="http://schemas.openxmlformats.org/drawingml/2006/main" noGrp="1"/>
-          </p:cNvSpPr>
-          <p:nvPr/>
-        </p:nvSpPr>
-        <p:spPr>
-          <a:xfrm xmlns:a="http://schemas.openxmlformats.org/drawingml/2006/main">
-            <a:off x="647700" y="400050"/>
-            <a:ext cx="8572500" cy="238125"/>
-          </a:xfrm>
-          <a:prstGeom xmlns:a="http://schemas.openxmlformats.org/drawingml/2006/main" prst="rect">
-            <a:avLst/>
-          </a:prstGeom>
-          <a:noFill xmlns:a="http://schemas.openxmlformats.org/drawingml/2006/main"/>
-          <a:ln xmlns:a="http://schemas.openxmlformats.org/drawingml/2006/main" w="0">
-            <a:noFill/>
-            <a:prstDash val="solid"/>
-          </a:ln>
-        </p:spPr>
-        <p:txBody>
-          <a:bodyPr xmlns:a="http://schemas.openxmlformats.org/drawingml/2006/main" wrap="square" lIns="0" tIns="0" rIns="0" bIns="0" anchor="t">
-            <a:normAutofit fontScale="100000"/>
-          </a:bodyPr>
-          <a:lstStyle xmlns:a="http://schemas.openxmlformats.org/drawingml/2006/main">
-            <a:defPPr algn="l">
-              <a:defRPr sz="1200" b="1">
-                <a:solidFill>
-                  <a:srgbClr val="0F62FE"/>
-                </a:solidFill>
-                <a:latin typeface="Arial"/>
-                <a:ea typeface="Arial"/>
-                <a:cs typeface="Arial"/>
-              </a:defRPr>
-            </a:defPPr>
-            <a:lvl1pPr algn="l">
-              <a:defRPr sz="1200" b="1">
-                <a:solidFill>
-                  <a:srgbClr val="0F62FE"/>
-                </a:solidFill>
-                <a:latin typeface="Arial"/>
-                <a:ea typeface="Arial"/>
-                <a:cs typeface="Arial"/>
-              </a:defRPr>
-            </a:lvl1pPr>
-            <a:lvl2pPr algn="l">
-              <a:defRPr sz="1200" b="1">
-                <a:solidFill>
-                  <a:srgbClr val="0F62FE"/>
-                </a:solidFill>
-                <a:latin typeface="Arial"/>
-                <a:ea typeface="Arial"/>
-                <a:cs typeface="Arial"/>
-              </a:defRPr>
-            </a:lvl2pPr>
-            <a:lvl3pPr algn="l">
-              <a:defRPr sz="1200" b="1">
-                <a:solidFill>
-                  <a:srgbClr val="0F62FE"/>
-                </a:solidFill>
-                <a:latin typeface="Arial"/>
-                <a:ea typeface="Arial"/>
-                <a:cs typeface="Arial"/>
-              </a:defRPr>
-            </a:lvl3pPr>
-            <a:lvl4pPr algn="l">
-              <a:defRPr sz="1200" b="1">
-                <a:solidFill>
-                  <a:srgbClr val="0F62FE"/>
-                </a:solidFill>
-                <a:latin typeface="Arial"/>
-                <a:ea typeface="Arial"/>
-                <a:cs typeface="Arial"/>
-              </a:defRPr>
-            </a:lvl4pPr>
-            <a:lvl5pPr algn="l">
-              <a:defRPr sz="1200" b="1">
-                <a:solidFill>
-                  <a:srgbClr val="0F62FE"/>
-                </a:solidFill>
-                <a:latin typeface="Arial"/>
-                <a:ea typeface="Arial"/>
-                <a:cs typeface="Arial"/>
-              </a:defRPr>
-            </a:lvl5pPr>
-            <a:lvl6pPr algn="l">
-              <a:defRPr sz="1200" b="1">
-                <a:solidFill>
-                  <a:srgbClr val="0F62FE"/>
-                </a:solidFill>
-                <a:latin typeface="Arial"/>
-                <a:ea typeface="Arial"/>
-                <a:cs typeface="Arial"/>
-              </a:defRPr>
-            </a:lvl6pPr>
-            <a:lvl7pPr algn="l">
-              <a:defRPr sz="1200" b="1">
-                <a:solidFill>
-                  <a:srgbClr val="0F62FE"/>
-                </a:solidFill>
-                <a:latin typeface="Arial"/>
-                <a:ea typeface="Arial"/>
-                <a:cs typeface="Arial"/>
-              </a:defRPr>
-            </a:lvl7pPr>
-            <a:lvl8pPr algn="l">
-              <a:defRPr sz="1200" b="1">
-                <a:solidFill>
-                  <a:srgbClr val="0F62FE"/>
-                </a:solidFill>
-                <a:latin typeface="Arial"/>
-                <a:ea typeface="Arial"/>
-                <a:cs typeface="Arial"/>
-              </a:defRPr>
-            </a:lvl8pPr>
-            <a:lvl9pPr algn="l">
-              <a:defRPr sz="1200" b="1">
-                <a:solidFill>
-                  <a:srgbClr val="0F62FE"/>
-                </a:solidFill>
-                <a:latin typeface="Arial"/>
-                <a:ea typeface="Arial"/>
-                <a:cs typeface="Arial"/>
-              </a:defRPr>
-            </a:lvl9pPr>
-          </a:lstStyle>
-          <a:p xmlns:a="http://schemas.openxmlformats.org/drawingml/2006/main">
-            <a:pPr algn="l">
-              <a:defRPr sz="1200" b="1">
-                <a:solidFill>
-                  <a:srgbClr val="0F62FE"/>
-                </a:solidFill>
-                <a:latin typeface="Arial"/>
-                <a:ea typeface="Arial"/>
-                <a:cs typeface="Arial"/>
-              </a:defRPr>
-            </a:pPr>
-            <a:r>
-              <a:rPr sz="1200" b="1">
-                <a:solidFill>
-                  <a:srgbClr val="0F62FE"/>
-                </a:solidFill>
-                <a:latin typeface="Arial"/>
-                <a:ea typeface="Arial"/>
-                <a:cs typeface="Arial"/>
-              </a:rPr>
-              <a:t>QISKIT FALL FEST 2026 · TRACK 1</a:t>
-            </a:r>
-          </a:p>
-        </p:txBody>
-      </p:sp>
-      <p:sp>
-        <p:nvSpPr>
-          <p:cNvPr id="2" name="">
-            <a:extLst xmlns:a="http://schemas.openxmlformats.org/drawingml/2006/main">
-              <a:ext uri="{FF2B5EF4-FFF2-40B4-BE49-F238E27FC236}">
-                <a16:creationId xmlns:a16="http://schemas.microsoft.com/office/drawing/2014/main" id="{814B0C51-14DD-4AE6-8E08-98A8DEB7C4D0}"/>
-              </a:ext>
-            </a:extLst>
-          </p:cNvPr>
-          <p:cNvSpPr>
-            <a:spLocks xmlns:a="http://schemas.openxmlformats.org/drawingml/2006/main" noGrp="1"/>
-          </p:cNvSpPr>
-          <p:nvPr/>
-        </p:nvSpPr>
-        <p:spPr>
-          <a:xfrm xmlns:a="http://schemas.openxmlformats.org/drawingml/2006/main">
-            <a:off x="647700" y="781050"/>
-            <a:ext cx="10896600" cy="619125"/>
-          </a:xfrm>
-          <a:prstGeom xmlns:a="http://schemas.openxmlformats.org/drawingml/2006/main" prst="rect">
-            <a:avLst/>
-          </a:prstGeom>
-          <a:noFill xmlns:a="http://schemas.openxmlformats.org/drawingml/2006/main"/>
-          <a:ln xmlns:a="http://schemas.openxmlformats.org/drawingml/2006/main" w="0">
-            <a:noFill/>
-            <a:prstDash val="solid"/>
-          </a:ln>
-        </p:spPr>
-        <p:txBody>
-          <a:bodyPr xmlns:a="http://schemas.openxmlformats.org/drawingml/2006/main" wrap="square" lIns="0" tIns="0" rIns="0" bIns="0" anchor="t">
-            <a:normAutofit fontScale="100000"/>
-          </a:bodyPr>
-          <a:lstStyle xmlns:a="http://schemas.openxmlformats.org/drawingml/2006/main">
-            <a:defPPr algn="l">
-              <a:defRPr sz="3300" b="1">
-                <a:solidFill>
-                  <a:srgbClr val="161616"/>
-                </a:solidFill>
-                <a:latin typeface="Arial"/>
-                <a:ea typeface="Arial"/>
-                <a:cs typeface="Arial"/>
-              </a:defRPr>
-            </a:defPPr>
-            <a:lvl1pPr algn="l">
-              <a:defRPr sz="3300" b="1">
-                <a:solidFill>
-                  <a:srgbClr val="161616"/>
-                </a:solidFill>
-                <a:latin typeface="Arial"/>
-                <a:ea typeface="Arial"/>
-                <a:cs typeface="Arial"/>
-              </a:defRPr>
-            </a:lvl1pPr>
-            <a:lvl2pPr algn="l">
-              <a:defRPr sz="3300" b="1">
-                <a:solidFill>
-                  <a:srgbClr val="161616"/>
-                </a:solidFill>
-                <a:latin typeface="Arial"/>
-                <a:ea typeface="Arial"/>
-                <a:cs typeface="Arial"/>
-              </a:defRPr>
-            </a:lvl2pPr>
-            <a:lvl3pPr algn="l">
-              <a:defRPr sz="3300" b="1">
-                <a:solidFill>
-                  <a:srgbClr val="161616"/>
-                </a:solidFill>
-                <a:latin typeface="Arial"/>
-                <a:ea typeface="Arial"/>
-                <a:cs typeface="Arial"/>
-              </a:defRPr>
-            </a:lvl3pPr>
-            <a:lvl4pPr algn="l">
-              <a:defRPr sz="3300" b="1">
-                <a:solidFill>
-                  <a:srgbClr val="161616"/>
-                </a:solidFill>
-                <a:latin typeface="Arial"/>
-                <a:ea typeface="Arial"/>
-                <a:cs typeface="Arial"/>
-              </a:defRPr>
-            </a:lvl4pPr>
-            <a:lvl5pPr algn="l">
-              <a:defRPr sz="3300" b="1">
-                <a:solidFill>
-                  <a:srgbClr val="161616"/>
-                </a:solidFill>
-                <a:latin typeface="Arial"/>
-                <a:ea typeface="Arial"/>
-                <a:cs typeface="Arial"/>
-              </a:defRPr>
-            </a:lvl5pPr>
-            <a:lvl6pPr algn="l">
-              <a:defRPr sz="3300" b="1">
-                <a:solidFill>
-                  <a:srgbClr val="161616"/>
-                </a:solidFill>
-                <a:latin typeface="Arial"/>
-                <a:ea typeface="Arial"/>
-                <a:cs typeface="Arial"/>
-              </a:defRPr>
-            </a:lvl6pPr>
-            <a:lvl7pPr algn="l">
-              <a:defRPr sz="3300" b="1">
-                <a:solidFill>
-                  <a:srgbClr val="161616"/>
-                </a:solidFill>
-                <a:latin typeface="Arial"/>
-                <a:ea typeface="Arial"/>
-                <a:cs typeface="Arial"/>
-              </a:defRPr>
-            </a:lvl7pPr>
-            <a:lvl8pPr algn="l">
-              <a:defRPr sz="3300" b="1">
-                <a:solidFill>
-                  <a:srgbClr val="161616"/>
-                </a:solidFill>
-                <a:latin typeface="Arial"/>
-                <a:ea typeface="Arial"/>
-                <a:cs typeface="Arial"/>
-              </a:defRPr>
-            </a:lvl8pPr>
-            <a:lvl9pPr algn="l">
-              <a:defRPr sz="3300" b="1">
-                <a:solidFill>
-                  <a:srgbClr val="161616"/>
-                </a:solidFill>
-                <a:latin typeface="Arial"/>
-                <a:ea typeface="Arial"/>
-                <a:cs typeface="Arial"/>
-              </a:defRPr>
-            </a:lvl9pPr>
-          </a:lstStyle>
-          <a:p xmlns:a="http://schemas.openxmlformats.org/drawingml/2006/main">
-            <a:pPr algn="l">
-              <a:defRPr sz="3300" b="1">
-                <a:solidFill>
-                  <a:srgbClr val="161616"/>
-                </a:solidFill>
-                <a:latin typeface="Arial"/>
-                <a:ea typeface="Arial"/>
-                <a:cs typeface="Arial"/>
-              </a:defRPr>
-            </a:pPr>
-            <a:r>
-              <a:rPr sz="3300" b="1">
-                <a:solidFill>
-                  <a:srgbClr val="161616"/>
-                </a:solidFill>
-                <a:latin typeface="Arial"/>
-                <a:ea typeface="Arial"/>
-                <a:cs typeface="Arial"/>
-              </a:rPr>
-              <a:t>Questions judges may ask</a:t>
-            </a:r>
-          </a:p>
-        </p:txBody>
-      </p:sp>
-      <p:sp>
-        <p:nvSpPr>
-          <p:cNvPr id="3" name="">
-            <a:extLst xmlns:a="http://schemas.openxmlformats.org/drawingml/2006/main">
-              <a:ext uri="{FF2B5EF4-FFF2-40B4-BE49-F238E27FC236}">
-                <a16:creationId xmlns:a16="http://schemas.microsoft.com/office/drawing/2014/main" id="{73272543-F921-4704-9B00-FD10806CD276}"/>
-              </a:ext>
-            </a:extLst>
-          </p:cNvPr>
-          <p:cNvSpPr>
-            <a:spLocks xmlns:a="http://schemas.openxmlformats.org/drawingml/2006/main" noGrp="1"/>
-          </p:cNvSpPr>
-          <p:nvPr/>
-        </p:nvSpPr>
-        <p:spPr>
-          <a:xfrm xmlns:a="http://schemas.openxmlformats.org/drawingml/2006/main">
-            <a:off x="685800" y="1666875"/>
-            <a:ext cx="5143500" cy="323850"/>
-          </a:xfrm>
-          <a:prstGeom xmlns:a="http://schemas.openxmlformats.org/drawingml/2006/main" prst="rect">
-            <a:avLst/>
-          </a:prstGeom>
-          <a:noFill xmlns:a="http://schemas.openxmlformats.org/drawingml/2006/main"/>
-          <a:ln xmlns:a="http://schemas.openxmlformats.org/drawingml/2006/main" w="0">
-            <a:noFill/>
-            <a:prstDash val="solid"/>
-          </a:ln>
-        </p:spPr>
-        <p:txBody>
-          <a:bodyPr xmlns:a="http://schemas.openxmlformats.org/drawingml/2006/main" wrap="square" lIns="0" tIns="0" rIns="0" bIns="0" anchor="t">
-            <a:normAutofit fontScale="100000"/>
-          </a:bodyPr>
-          <a:lstStyle xmlns:a="http://schemas.openxmlformats.org/drawingml/2006/main">
-            <a:defPPr algn="l">
-              <a:defRPr sz="1425" b="1">
-                <a:solidFill>
-                  <a:srgbClr val="0F62FE"/>
-                </a:solidFill>
-                <a:latin typeface="Arial"/>
-                <a:ea typeface="Arial"/>
-                <a:cs typeface="Arial"/>
-              </a:defRPr>
-            </a:defPPr>
-            <a:lvl1pPr algn="l">
-              <a:defRPr sz="1425" b="1">
-                <a:solidFill>
-                  <a:srgbClr val="0F62FE"/>
-                </a:solidFill>
-                <a:latin typeface="Arial"/>
-                <a:ea typeface="Arial"/>
-                <a:cs typeface="Arial"/>
-              </a:defRPr>
-            </a:lvl1pPr>
-            <a:lvl2pPr algn="l">
-              <a:defRPr sz="1425" b="1">
-                <a:solidFill>
-                  <a:srgbClr val="0F62FE"/>
-                </a:solidFill>
-                <a:latin typeface="Arial"/>
-                <a:ea typeface="Arial"/>
-                <a:cs typeface="Arial"/>
-              </a:defRPr>
-            </a:lvl2pPr>
-            <a:lvl3pPr algn="l">
-              <a:defRPr sz="1425" b="1">
-                <a:solidFill>
-                  <a:srgbClr val="0F62FE"/>
-                </a:solidFill>
-                <a:latin typeface="Arial"/>
-                <a:ea typeface="Arial"/>
-                <a:cs typeface="Arial"/>
-              </a:defRPr>
-            </a:lvl3pPr>
-            <a:lvl4pPr algn="l">
-              <a:defRPr sz="1425" b="1">
-                <a:solidFill>
-                  <a:srgbClr val="0F62FE"/>
-                </a:solidFill>
-                <a:latin typeface="Arial"/>
-                <a:ea typeface="Arial"/>
-                <a:cs typeface="Arial"/>
-              </a:defRPr>
-            </a:lvl4pPr>
-            <a:lvl5pPr algn="l">
-              <a:defRPr sz="1425" b="1">
-                <a:solidFill>
-                  <a:srgbClr val="0F62FE"/>
-                </a:solidFill>
-                <a:latin typeface="Arial"/>
-                <a:ea typeface="Arial"/>
-                <a:cs typeface="Arial"/>
-              </a:defRPr>
-            </a:lvl5pPr>
-            <a:lvl6pPr algn="l">
-              <a:defRPr sz="1425" b="1">
-                <a:solidFill>
-                  <a:srgbClr val="0F62FE"/>
-                </a:solidFill>
-                <a:latin typeface="Arial"/>
-                <a:ea typeface="Arial"/>
-                <a:cs typeface="Arial"/>
-              </a:defRPr>
-            </a:lvl6pPr>
-            <a:lvl7pPr algn="l">
-              <a:defRPr sz="1425" b="1">
-                <a:solidFill>
-                  <a:srgbClr val="0F62FE"/>
-                </a:solidFill>
-                <a:latin typeface="Arial"/>
-                <a:ea typeface="Arial"/>
-                <a:cs typeface="Arial"/>
-              </a:defRPr>
-            </a:lvl7pPr>
-            <a:lvl8pPr algn="l">
-              <a:defRPr sz="1425" b="1">
-                <a:solidFill>
-                  <a:srgbClr val="0F62FE"/>
-                </a:solidFill>
-                <a:latin typeface="Arial"/>
-                <a:ea typeface="Arial"/>
-                <a:cs typeface="Arial"/>
-              </a:defRPr>
-            </a:lvl8pPr>
-            <a:lvl9pPr algn="l">
-              <a:defRPr sz="1425" b="1">
-                <a:solidFill>
-                  <a:srgbClr val="0F62FE"/>
-                </a:solidFill>
-                <a:latin typeface="Arial"/>
-                <a:ea typeface="Arial"/>
-                <a:cs typeface="Arial"/>
-              </a:defRPr>
-            </a:lvl9pPr>
-          </a:lstStyle>
-          <a:p xmlns:a="http://schemas.openxmlformats.org/drawingml/2006/main">
-            <a:pPr algn="l">
-              <a:defRPr sz="1425" b="1">
-                <a:solidFill>
-                  <a:srgbClr val="0F62FE"/>
-                </a:solidFill>
-                <a:latin typeface="Arial"/>
-                <a:ea typeface="Arial"/>
-                <a:cs typeface="Arial"/>
-              </a:defRPr>
-            </a:pPr>
-            <a:r>
-              <a:rPr sz="1425" b="1">
-                <a:solidFill>
-                  <a:srgbClr val="0F62FE"/>
-                </a:solidFill>
-                <a:latin typeface="Arial"/>
-                <a:ea typeface="Arial"/>
-                <a:cs typeface="Arial"/>
-              </a:rPr>
-              <a:t>What is the fidelity metric?</a:t>
-            </a:r>
-          </a:p>
-        </p:txBody>
-      </p:sp>
-      <p:sp>
-        <p:nvSpPr>
-          <p:cNvPr id="4" name="">
-            <a:extLst xmlns:a="http://schemas.openxmlformats.org/drawingml/2006/main">
-              <a:ext uri="{FF2B5EF4-FFF2-40B4-BE49-F238E27FC236}">
-                <a16:creationId xmlns:a16="http://schemas.microsoft.com/office/drawing/2014/main" id="{C9C0D03D-8A00-4C3E-A9B1-45F0C003A248}"/>
-              </a:ext>
-            </a:extLst>
-          </p:cNvPr>
-          <p:cNvSpPr>
-            <a:spLocks xmlns:a="http://schemas.openxmlformats.org/drawingml/2006/main" noGrp="1"/>
-          </p:cNvSpPr>
-          <p:nvPr/>
-        </p:nvSpPr>
-        <p:spPr>
-          <a:xfrm xmlns:a="http://schemas.openxmlformats.org/drawingml/2006/main">
-            <a:off x="685800" y="2076450"/>
-            <a:ext cx="5095875" cy="714375"/>
-          </a:xfrm>
-          <a:prstGeom xmlns:a="http://schemas.openxmlformats.org/drawingml/2006/main" prst="rect">
-            <a:avLst/>
-          </a:prstGeom>
-          <a:noFill xmlns:a="http://schemas.openxmlformats.org/drawingml/2006/main"/>
-          <a:ln xmlns:a="http://schemas.openxmlformats.org/drawingml/2006/main" w="0">
-            <a:noFill/>
-            <a:prstDash val="solid"/>
-          </a:ln>
-        </p:spPr>
-        <p:txBody>
-          <a:bodyPr xmlns:a="http://schemas.openxmlformats.org/drawingml/2006/main" wrap="square" lIns="0" tIns="0" rIns="0" bIns="0" anchor="t">
-            <a:normAutofit fontScale="100000"/>
-          </a:bodyPr>
-          <a:lstStyle xmlns:a="http://schemas.openxmlformats.org/drawingml/2006/main">
-            <a:defPPr algn="l">
-              <a:defRPr sz="1500" b="0">
-                <a:solidFill>
-                  <a:srgbClr val="161616"/>
-                </a:solidFill>
-                <a:latin typeface="Arial"/>
-                <a:ea typeface="Arial"/>
-                <a:cs typeface="Arial"/>
-              </a:defRPr>
-            </a:defPPr>
-            <a:lvl1pPr algn="l">
-              <a:defRPr sz="1500" b="0">
-                <a:solidFill>
-                  <a:srgbClr val="161616"/>
-                </a:solidFill>
-                <a:latin typeface="Arial"/>
-                <a:ea typeface="Arial"/>
-                <a:cs typeface="Arial"/>
-              </a:defRPr>
-            </a:lvl1pPr>
-            <a:lvl2pPr algn="l">
-              <a:defRPr sz="1500" b="0">
-                <a:solidFill>
-                  <a:srgbClr val="161616"/>
-                </a:solidFill>
-                <a:latin typeface="Arial"/>
-                <a:ea typeface="Arial"/>
-                <a:cs typeface="Arial"/>
-              </a:defRPr>
-            </a:lvl2pPr>
-            <a:lvl3pPr algn="l">
-              <a:defRPr sz="1500" b="0">
-                <a:solidFill>
-                  <a:srgbClr val="161616"/>
-                </a:solidFill>
-                <a:latin typeface="Arial"/>
-                <a:ea typeface="Arial"/>
-                <a:cs typeface="Arial"/>
-              </a:defRPr>
-            </a:lvl3pPr>
-            <a:lvl4pPr algn="l">
-              <a:defRPr sz="1500" b="0">
-                <a:solidFill>
-                  <a:srgbClr val="161616"/>
-                </a:solidFill>
-                <a:latin typeface="Arial"/>
-                <a:ea typeface="Arial"/>
-                <a:cs typeface="Arial"/>
-              </a:defRPr>
-            </a:lvl4pPr>
-            <a:lvl5pPr algn="l">
-              <a:defRPr sz="1500" b="0">
-                <a:solidFill>
-                  <a:srgbClr val="161616"/>
-                </a:solidFill>
-                <a:latin typeface="Arial"/>
-                <a:ea typeface="Arial"/>
-                <a:cs typeface="Arial"/>
-              </a:defRPr>
-            </a:lvl5pPr>
-            <a:lvl6pPr algn="l">
-              <a:defRPr sz="1500" b="0">
-                <a:solidFill>
-                  <a:srgbClr val="161616"/>
-                </a:solidFill>
-                <a:latin typeface="Arial"/>
-                <a:ea typeface="Arial"/>
-                <a:cs typeface="Arial"/>
-              </a:defRPr>
-            </a:lvl6pPr>
-            <a:lvl7pPr algn="l">
-              <a:defRPr sz="1500" b="0">
-                <a:solidFill>
-                  <a:srgbClr val="161616"/>
-                </a:solidFill>
-                <a:latin typeface="Arial"/>
-                <a:ea typeface="Arial"/>
-                <a:cs typeface="Arial"/>
-              </a:defRPr>
-            </a:lvl7pPr>
-            <a:lvl8pPr algn="l">
-              <a:defRPr sz="1500" b="0">
-                <a:solidFill>
-                  <a:srgbClr val="161616"/>
-                </a:solidFill>
-                <a:latin typeface="Arial"/>
-                <a:ea typeface="Arial"/>
-                <a:cs typeface="Arial"/>
-              </a:defRPr>
-            </a:lvl8pPr>
-            <a:lvl9pPr algn="l">
-              <a:defRPr sz="1500" b="0">
-                <a:solidFill>
-                  <a:srgbClr val="161616"/>
-                </a:solidFill>
-                <a:latin typeface="Arial"/>
-                <a:ea typeface="Arial"/>
-                <a:cs typeface="Arial"/>
-              </a:defRPr>
-            </a:lvl9pPr>
-          </a:lstStyle>
-          <a:p xmlns:a="http://schemas.openxmlformats.org/drawingml/2006/main">
-            <a:pPr algn="l">
-              <a:defRPr sz="1500" b="0">
-                <a:solidFill>
-                  <a:srgbClr val="161616"/>
-                </a:solidFill>
-                <a:latin typeface="Arial"/>
-                <a:ea typeface="Arial"/>
-                <a:cs typeface="Arial"/>
-              </a:defRPr>
-            </a:pPr>
-            <a:r>
-              <a:rPr sz="1500" b="0">
-                <a:solidFill>
-                  <a:srgbClr val="161616"/>
-                </a:solidFill>
-                <a:latin typeface="Arial"/>
-                <a:ea typeface="Arial"/>
-                <a:cs typeface="Arial"/>
-              </a:rPr>
-              <a:t>Squared Bhattacharyya coefficient between ideal and observed classical output distributions.</a:t>
-            </a:r>
-          </a:p>
-        </p:txBody>
-      </p:sp>
-      <p:sp>
-        <p:nvSpPr>
-          <p:cNvPr id="5" name="">
-            <a:extLst xmlns:a="http://schemas.openxmlformats.org/drawingml/2006/main">
-              <a:ext uri="{FF2B5EF4-FFF2-40B4-BE49-F238E27FC236}">
-                <a16:creationId xmlns:a16="http://schemas.microsoft.com/office/drawing/2014/main" id="{8F97E5A1-A3BF-4202-B483-19B00D5FDC8D}"/>
-              </a:ext>
-            </a:extLst>
-          </p:cNvPr>
-          <p:cNvSpPr>
-            <a:spLocks xmlns:a="http://schemas.openxmlformats.org/drawingml/2006/main" noGrp="1"/>
-          </p:cNvSpPr>
-          <p:nvPr/>
-        </p:nvSpPr>
-        <p:spPr>
-          <a:xfrm xmlns:a="http://schemas.openxmlformats.org/drawingml/2006/main">
-            <a:off x="6305550" y="1666875"/>
-            <a:ext cx="5143500" cy="323850"/>
-          </a:xfrm>
-          <a:prstGeom xmlns:a="http://schemas.openxmlformats.org/drawingml/2006/main" prst="rect">
-            <a:avLst/>
-          </a:prstGeom>
-          <a:noFill xmlns:a="http://schemas.openxmlformats.org/drawingml/2006/main"/>
-          <a:ln xmlns:a="http://schemas.openxmlformats.org/drawingml/2006/main" w="0">
-            <a:noFill/>
-            <a:prstDash val="solid"/>
-          </a:ln>
-        </p:spPr>
-        <p:txBody>
-          <a:bodyPr xmlns:a="http://schemas.openxmlformats.org/drawingml/2006/main" wrap="square" lIns="0" tIns="0" rIns="0" bIns="0" anchor="t">
-            <a:normAutofit fontScale="100000"/>
-          </a:bodyPr>
-          <a:lstStyle xmlns:a="http://schemas.openxmlformats.org/drawingml/2006/main">
-            <a:defPPr algn="l">
-              <a:defRPr sz="1425" b="1">
-                <a:solidFill>
-                  <a:srgbClr val="009D9A"/>
-                </a:solidFill>
-                <a:latin typeface="Arial"/>
-                <a:ea typeface="Arial"/>
-                <a:cs typeface="Arial"/>
-              </a:defRPr>
-            </a:defPPr>
-            <a:lvl1pPr algn="l">
-              <a:defRPr sz="1425" b="1">
-                <a:solidFill>
-                  <a:srgbClr val="009D9A"/>
-                </a:solidFill>
-                <a:latin typeface="Arial"/>
-                <a:ea typeface="Arial"/>
-                <a:cs typeface="Arial"/>
-              </a:defRPr>
-            </a:lvl1pPr>
-            <a:lvl2pPr algn="l">
-              <a:defRPr sz="1425" b="1">
-                <a:solidFill>
-                  <a:srgbClr val="009D9A"/>
-                </a:solidFill>
-                <a:latin typeface="Arial"/>
-                <a:ea typeface="Arial"/>
-                <a:cs typeface="Arial"/>
-              </a:defRPr>
-            </a:lvl2pPr>
-            <a:lvl3pPr algn="l">
-              <a:defRPr sz="1425" b="1">
-                <a:solidFill>
-                  <a:srgbClr val="009D9A"/>
-                </a:solidFill>
-                <a:latin typeface="Arial"/>
-                <a:ea typeface="Arial"/>
-                <a:cs typeface="Arial"/>
-              </a:defRPr>
-            </a:lvl3pPr>
-            <a:lvl4pPr algn="l">
-              <a:defRPr sz="1425" b="1">
-                <a:solidFill>
-                  <a:srgbClr val="009D9A"/>
-                </a:solidFill>
-                <a:latin typeface="Arial"/>
-                <a:ea typeface="Arial"/>
-                <a:cs typeface="Arial"/>
-              </a:defRPr>
-            </a:lvl4pPr>
-            <a:lvl5pPr algn="l">
-              <a:defRPr sz="1425" b="1">
-                <a:solidFill>
-                  <a:srgbClr val="009D9A"/>
-                </a:solidFill>
-                <a:latin typeface="Arial"/>
-                <a:ea typeface="Arial"/>
-                <a:cs typeface="Arial"/>
-              </a:defRPr>
-            </a:lvl5pPr>
-            <a:lvl6pPr algn="l">
-              <a:defRPr sz="1425" b="1">
-                <a:solidFill>
-                  <a:srgbClr val="009D9A"/>
-                </a:solidFill>
-                <a:latin typeface="Arial"/>
-                <a:ea typeface="Arial"/>
-                <a:cs typeface="Arial"/>
-              </a:defRPr>
-            </a:lvl6pPr>
-            <a:lvl7pPr algn="l">
-              <a:defRPr sz="1425" b="1">
-                <a:solidFill>
-                  <a:srgbClr val="009D9A"/>
-                </a:solidFill>
-                <a:latin typeface="Arial"/>
-                <a:ea typeface="Arial"/>
-                <a:cs typeface="Arial"/>
-              </a:defRPr>
-            </a:lvl7pPr>
-            <a:lvl8pPr algn="l">
-              <a:defRPr sz="1425" b="1">
-                <a:solidFill>
-                  <a:srgbClr val="009D9A"/>
-                </a:solidFill>
-                <a:latin typeface="Arial"/>
-                <a:ea typeface="Arial"/>
-                <a:cs typeface="Arial"/>
-              </a:defRPr>
-            </a:lvl8pPr>
-            <a:lvl9pPr algn="l">
-              <a:defRPr sz="1425" b="1">
-                <a:solidFill>
-                  <a:srgbClr val="009D9A"/>
-                </a:solidFill>
-                <a:latin typeface="Arial"/>
-                <a:ea typeface="Arial"/>
-                <a:cs typeface="Arial"/>
-              </a:defRPr>
-            </a:lvl9pPr>
-          </a:lstStyle>
-          <a:p xmlns:a="http://schemas.openxmlformats.org/drawingml/2006/main">
-            <a:pPr algn="l">
-              <a:defRPr sz="1425" b="1">
-                <a:solidFill>
-                  <a:srgbClr val="009D9A"/>
-                </a:solidFill>
-                <a:latin typeface="Arial"/>
-                <a:ea typeface="Arial"/>
-                <a:cs typeface="Arial"/>
-              </a:defRPr>
-            </a:pPr>
-            <a:r>
-              <a:rPr sz="1425" b="1">
-                <a:solidFill>
-                  <a:srgbClr val="009D9A"/>
-                </a:solidFill>
-                <a:latin typeface="Arial"/>
-                <a:ea typeface="Arial"/>
-                <a:cs typeface="Arial"/>
-              </a:rPr>
-              <a:t>Does zero syndrome mean no error?</a:t>
-            </a:r>
-          </a:p>
-        </p:txBody>
-      </p:sp>
-      <p:sp>
-        <p:nvSpPr>
-          <p:cNvPr id="6" name="">
-            <a:extLst xmlns:a="http://schemas.openxmlformats.org/drawingml/2006/main">
-              <a:ext uri="{FF2B5EF4-FFF2-40B4-BE49-F238E27FC236}">
-                <a16:creationId xmlns:a16="http://schemas.microsoft.com/office/drawing/2014/main" id="{35237F64-1592-48DD-BD05-5705900058D9}"/>
-              </a:ext>
-            </a:extLst>
-          </p:cNvPr>
-          <p:cNvSpPr>
-            <a:spLocks xmlns:a="http://schemas.openxmlformats.org/drawingml/2006/main" noGrp="1"/>
-          </p:cNvSpPr>
-          <p:nvPr/>
-        </p:nvSpPr>
-        <p:spPr>
-          <a:xfrm xmlns:a="http://schemas.openxmlformats.org/drawingml/2006/main">
-            <a:off x="6305550" y="2076450"/>
-            <a:ext cx="5095875" cy="714375"/>
-          </a:xfrm>
-          <a:prstGeom xmlns:a="http://schemas.openxmlformats.org/drawingml/2006/main" prst="rect">
-            <a:avLst/>
-          </a:prstGeom>
-          <a:noFill xmlns:a="http://schemas.openxmlformats.org/drawingml/2006/main"/>
-          <a:ln xmlns:a="http://schemas.openxmlformats.org/drawingml/2006/main" w="0">
-            <a:noFill/>
-            <a:prstDash val="solid"/>
-          </a:ln>
-        </p:spPr>
-        <p:txBody>
-          <a:bodyPr xmlns:a="http://schemas.openxmlformats.org/drawingml/2006/main" wrap="square" lIns="0" tIns="0" rIns="0" bIns="0" anchor="t">
-            <a:normAutofit fontScale="100000"/>
-          </a:bodyPr>
-          <a:lstStyle xmlns:a="http://schemas.openxmlformats.org/drawingml/2006/main">
-            <a:defPPr algn="l">
-              <a:defRPr sz="1500" b="0">
-                <a:solidFill>
-                  <a:srgbClr val="161616"/>
-                </a:solidFill>
-                <a:latin typeface="Arial"/>
-                <a:ea typeface="Arial"/>
-                <a:cs typeface="Arial"/>
-              </a:defRPr>
-            </a:defPPr>
-            <a:lvl1pPr algn="l">
-              <a:defRPr sz="1500" b="0">
-                <a:solidFill>
-                  <a:srgbClr val="161616"/>
-                </a:solidFill>
-                <a:latin typeface="Arial"/>
-                <a:ea typeface="Arial"/>
-                <a:cs typeface="Arial"/>
-              </a:defRPr>
-            </a:lvl1pPr>
-            <a:lvl2pPr algn="l">
-              <a:defRPr sz="1500" b="0">
-                <a:solidFill>
-                  <a:srgbClr val="161616"/>
-                </a:solidFill>
-                <a:latin typeface="Arial"/>
-                <a:ea typeface="Arial"/>
-                <a:cs typeface="Arial"/>
-              </a:defRPr>
-            </a:lvl2pPr>
-            <a:lvl3pPr algn="l">
-              <a:defRPr sz="1500" b="0">
-                <a:solidFill>
-                  <a:srgbClr val="161616"/>
-                </a:solidFill>
-                <a:latin typeface="Arial"/>
-                <a:ea typeface="Arial"/>
-                <a:cs typeface="Arial"/>
-              </a:defRPr>
-            </a:lvl3pPr>
-            <a:lvl4pPr algn="l">
-              <a:defRPr sz="1500" b="0">
-                <a:solidFill>
-                  <a:srgbClr val="161616"/>
-                </a:solidFill>
-                <a:latin typeface="Arial"/>
-                <a:ea typeface="Arial"/>
-                <a:cs typeface="Arial"/>
-              </a:defRPr>
-            </a:lvl4pPr>
-            <a:lvl5pPr algn="l">
-              <a:defRPr sz="1500" b="0">
-                <a:solidFill>
-                  <a:srgbClr val="161616"/>
-                </a:solidFill>
-                <a:latin typeface="Arial"/>
-                <a:ea typeface="Arial"/>
-                <a:cs typeface="Arial"/>
-              </a:defRPr>
-            </a:lvl5pPr>
-            <a:lvl6pPr algn="l">
-              <a:defRPr sz="1500" b="0">
-                <a:solidFill>
-                  <a:srgbClr val="161616"/>
-                </a:solidFill>
-                <a:latin typeface="Arial"/>
-                <a:ea typeface="Arial"/>
-                <a:cs typeface="Arial"/>
-              </a:defRPr>
-            </a:lvl6pPr>
-            <a:lvl7pPr algn="l">
-              <a:defRPr sz="1500" b="0">
-                <a:solidFill>
-                  <a:srgbClr val="161616"/>
-                </a:solidFill>
-                <a:latin typeface="Arial"/>
-                <a:ea typeface="Arial"/>
-                <a:cs typeface="Arial"/>
-              </a:defRPr>
-            </a:lvl7pPr>
-            <a:lvl8pPr algn="l">
-              <a:defRPr sz="1500" b="0">
-                <a:solidFill>
-                  <a:srgbClr val="161616"/>
-                </a:solidFill>
-                <a:latin typeface="Arial"/>
-                <a:ea typeface="Arial"/>
-                <a:cs typeface="Arial"/>
-              </a:defRPr>
-            </a:lvl8pPr>
-            <a:lvl9pPr algn="l">
-              <a:defRPr sz="1500" b="0">
-                <a:solidFill>
-                  <a:srgbClr val="161616"/>
-                </a:solidFill>
-                <a:latin typeface="Arial"/>
-                <a:ea typeface="Arial"/>
-                <a:cs typeface="Arial"/>
-              </a:defRPr>
-            </a:lvl9pPr>
-          </a:lstStyle>
-          <a:p xmlns:a="http://schemas.openxmlformats.org/drawingml/2006/main">
-            <a:pPr algn="l">
-              <a:defRPr sz="1500" b="0">
-                <a:solidFill>
-                  <a:srgbClr val="161616"/>
-                </a:solidFill>
-                <a:latin typeface="Arial"/>
-                <a:ea typeface="Arial"/>
-                <a:cs typeface="Arial"/>
-              </a:defRPr>
-            </a:pPr>
-            <a:r>
-              <a:rPr sz="1500" b="0">
-                <a:solidFill>
-                  <a:srgbClr val="161616"/>
-                </a:solidFill>
-                <a:latin typeface="Arial"/>
-                <a:ea typeface="Arial"/>
-                <a:cs typeface="Arial"/>
-              </a:rPr>
-              <a:t>No. It means the measured parity passed; undetected errors can remain.</a:t>
-            </a:r>
-          </a:p>
-        </p:txBody>
-      </p:sp>
-      <p:sp>
-        <p:nvSpPr>
-          <p:cNvPr id="7" name="">
-            <a:extLst xmlns:a="http://schemas.openxmlformats.org/drawingml/2006/main">
-              <a:ext uri="{FF2B5EF4-FFF2-40B4-BE49-F238E27FC236}">
-                <a16:creationId xmlns:a16="http://schemas.microsoft.com/office/drawing/2014/main" id="{EE5F1D0D-A97E-4CF9-A9CF-BE276E2B1398}"/>
-              </a:ext>
-            </a:extLst>
-          </p:cNvPr>
-          <p:cNvSpPr>
-            <a:spLocks xmlns:a="http://schemas.openxmlformats.org/drawingml/2006/main" noGrp="1"/>
-          </p:cNvSpPr>
-          <p:nvPr/>
-        </p:nvSpPr>
-        <p:spPr>
-          <a:xfrm xmlns:a="http://schemas.openxmlformats.org/drawingml/2006/main">
-            <a:off x="685800" y="3048000"/>
-            <a:ext cx="5143500" cy="323850"/>
-          </a:xfrm>
-          <a:prstGeom xmlns:a="http://schemas.openxmlformats.org/drawingml/2006/main" prst="rect">
-            <a:avLst/>
-          </a:prstGeom>
-          <a:noFill xmlns:a="http://schemas.openxmlformats.org/drawingml/2006/main"/>
-          <a:ln xmlns:a="http://schemas.openxmlformats.org/drawingml/2006/main" w="0">
-            <a:noFill/>
-            <a:prstDash val="solid"/>
-          </a:ln>
-        </p:spPr>
-        <p:txBody>
-          <a:bodyPr xmlns:a="http://schemas.openxmlformats.org/drawingml/2006/main" wrap="square" lIns="0" tIns="0" rIns="0" bIns="0" anchor="t">
-            <a:normAutofit fontScale="100000"/>
-          </a:bodyPr>
-          <a:lstStyle xmlns:a="http://schemas.openxmlformats.org/drawingml/2006/main">
-            <a:defPPr algn="l">
-              <a:defRPr sz="1425" b="1">
-                <a:solidFill>
-                  <a:srgbClr val="0F62FE"/>
-                </a:solidFill>
-                <a:latin typeface="Arial"/>
-                <a:ea typeface="Arial"/>
-                <a:cs typeface="Arial"/>
-              </a:defRPr>
-            </a:defPPr>
-            <a:lvl1pPr algn="l">
-              <a:defRPr sz="1425" b="1">
-                <a:solidFill>
-                  <a:srgbClr val="0F62FE"/>
-                </a:solidFill>
-                <a:latin typeface="Arial"/>
-                <a:ea typeface="Arial"/>
-                <a:cs typeface="Arial"/>
-              </a:defRPr>
-            </a:lvl1pPr>
-            <a:lvl2pPr algn="l">
-              <a:defRPr sz="1425" b="1">
-                <a:solidFill>
-                  <a:srgbClr val="0F62FE"/>
-                </a:solidFill>
-                <a:latin typeface="Arial"/>
-                <a:ea typeface="Arial"/>
-                <a:cs typeface="Arial"/>
-              </a:defRPr>
-            </a:lvl2pPr>
-            <a:lvl3pPr algn="l">
-              <a:defRPr sz="1425" b="1">
-                <a:solidFill>
-                  <a:srgbClr val="0F62FE"/>
-                </a:solidFill>
-                <a:latin typeface="Arial"/>
-                <a:ea typeface="Arial"/>
-                <a:cs typeface="Arial"/>
-              </a:defRPr>
-            </a:lvl3pPr>
-            <a:lvl4pPr algn="l">
-              <a:defRPr sz="1425" b="1">
-                <a:solidFill>
-                  <a:srgbClr val="0F62FE"/>
-                </a:solidFill>
-                <a:latin typeface="Arial"/>
-                <a:ea typeface="Arial"/>
-                <a:cs typeface="Arial"/>
-              </a:defRPr>
-            </a:lvl4pPr>
-            <a:lvl5pPr algn="l">
-              <a:defRPr sz="1425" b="1">
-                <a:solidFill>
-                  <a:srgbClr val="0F62FE"/>
-                </a:solidFill>
-                <a:latin typeface="Arial"/>
-                <a:ea typeface="Arial"/>
-                <a:cs typeface="Arial"/>
-              </a:defRPr>
-            </a:lvl5pPr>
-            <a:lvl6pPr algn="l">
-              <a:defRPr sz="1425" b="1">
-                <a:solidFill>
-                  <a:srgbClr val="0F62FE"/>
-                </a:solidFill>
-                <a:latin typeface="Arial"/>
-                <a:ea typeface="Arial"/>
-                <a:cs typeface="Arial"/>
-              </a:defRPr>
-            </a:lvl6pPr>
-            <a:lvl7pPr algn="l">
-              <a:defRPr sz="1425" b="1">
-                <a:solidFill>
-                  <a:srgbClr val="0F62FE"/>
-                </a:solidFill>
-                <a:latin typeface="Arial"/>
-                <a:ea typeface="Arial"/>
-                <a:cs typeface="Arial"/>
-              </a:defRPr>
-            </a:lvl7pPr>
-            <a:lvl8pPr algn="l">
-              <a:defRPr sz="1425" b="1">
-                <a:solidFill>
-                  <a:srgbClr val="0F62FE"/>
-                </a:solidFill>
-                <a:latin typeface="Arial"/>
-                <a:ea typeface="Arial"/>
-                <a:cs typeface="Arial"/>
-              </a:defRPr>
-            </a:lvl8pPr>
-            <a:lvl9pPr algn="l">
-              <a:defRPr sz="1425" b="1">
-                <a:solidFill>
-                  <a:srgbClr val="0F62FE"/>
-                </a:solidFill>
-                <a:latin typeface="Arial"/>
-                <a:ea typeface="Arial"/>
-                <a:cs typeface="Arial"/>
-              </a:defRPr>
-            </a:lvl9pPr>
-          </a:lstStyle>
-          <a:p xmlns:a="http://schemas.openxmlformats.org/drawingml/2006/main">
-            <a:pPr algn="l">
-              <a:defRPr sz="1425" b="1">
-                <a:solidFill>
-                  <a:srgbClr val="0F62FE"/>
-                </a:solidFill>
-                <a:latin typeface="Arial"/>
-                <a:ea typeface="Arial"/>
-                <a:cs typeface="Arial"/>
-              </a:defRPr>
-            </a:pPr>
-            <a:r>
-              <a:rPr sz="1425" b="1">
-                <a:solidFill>
-                  <a:srgbClr val="0F62FE"/>
-                </a:solidFill>
-                <a:latin typeface="Arial"/>
-                <a:ea typeface="Arial"/>
-                <a:cs typeface="Arial"/>
-              </a:rPr>
-              <a:t>Why did checks lower raw fidelity?</a:t>
-            </a:r>
-          </a:p>
-        </p:txBody>
-      </p:sp>
-      <p:sp>
-        <p:nvSpPr>
-          <p:cNvPr id="8" name="">
-            <a:extLst xmlns:a="http://schemas.openxmlformats.org/drawingml/2006/main">
-              <a:ext uri="{FF2B5EF4-FFF2-40B4-BE49-F238E27FC236}">
-                <a16:creationId xmlns:a16="http://schemas.microsoft.com/office/drawing/2014/main" id="{960F5DB6-EFAB-430A-ADF4-1EDC48C1EB69}"/>
-              </a:ext>
-            </a:extLst>
-          </p:cNvPr>
-          <p:cNvSpPr>
-            <a:spLocks xmlns:a="http://schemas.openxmlformats.org/drawingml/2006/main" noGrp="1"/>
-          </p:cNvSpPr>
-          <p:nvPr/>
-        </p:nvSpPr>
-        <p:spPr>
-          <a:xfrm xmlns:a="http://schemas.openxmlformats.org/drawingml/2006/main">
-            <a:off x="685800" y="3457575"/>
-            <a:ext cx="5095875" cy="714375"/>
-          </a:xfrm>
-          <a:prstGeom xmlns:a="http://schemas.openxmlformats.org/drawingml/2006/main" prst="rect">
-            <a:avLst/>
-          </a:prstGeom>
-          <a:noFill xmlns:a="http://schemas.openxmlformats.org/drawingml/2006/main"/>
-          <a:ln xmlns:a="http://schemas.openxmlformats.org/drawingml/2006/main" w="0">
-            <a:noFill/>
-            <a:prstDash val="solid"/>
-          </a:ln>
-        </p:spPr>
-        <p:txBody>
-          <a:bodyPr xmlns:a="http://schemas.openxmlformats.org/drawingml/2006/main" wrap="square" lIns="0" tIns="0" rIns="0" bIns="0" anchor="t">
-            <a:normAutofit fontScale="100000"/>
-          </a:bodyPr>
-          <a:lstStyle xmlns:a="http://schemas.openxmlformats.org/drawingml/2006/main">
-            <a:defPPr algn="l">
-              <a:defRPr sz="1500" b="0">
-                <a:solidFill>
-                  <a:srgbClr val="161616"/>
-                </a:solidFill>
-                <a:latin typeface="Arial"/>
-                <a:ea typeface="Arial"/>
-                <a:cs typeface="Arial"/>
-              </a:defRPr>
-            </a:defPPr>
-            <a:lvl1pPr algn="l">
-              <a:defRPr sz="1500" b="0">
-                <a:solidFill>
-                  <a:srgbClr val="161616"/>
-                </a:solidFill>
-                <a:latin typeface="Arial"/>
-                <a:ea typeface="Arial"/>
-                <a:cs typeface="Arial"/>
-              </a:defRPr>
-            </a:lvl1pPr>
-            <a:lvl2pPr algn="l">
-              <a:defRPr sz="1500" b="0">
-                <a:solidFill>
-                  <a:srgbClr val="161616"/>
-                </a:solidFill>
-                <a:latin typeface="Arial"/>
-                <a:ea typeface="Arial"/>
-                <a:cs typeface="Arial"/>
-              </a:defRPr>
-            </a:lvl2pPr>
-            <a:lvl3pPr algn="l">
-              <a:defRPr sz="1500" b="0">
-                <a:solidFill>
-                  <a:srgbClr val="161616"/>
-                </a:solidFill>
-                <a:latin typeface="Arial"/>
-                <a:ea typeface="Arial"/>
-                <a:cs typeface="Arial"/>
-              </a:defRPr>
-            </a:lvl3pPr>
-            <a:lvl4pPr algn="l">
-              <a:defRPr sz="1500" b="0">
-                <a:solidFill>
-                  <a:srgbClr val="161616"/>
-                </a:solidFill>
-                <a:latin typeface="Arial"/>
-                <a:ea typeface="Arial"/>
-                <a:cs typeface="Arial"/>
-              </a:defRPr>
-            </a:lvl4pPr>
-            <a:lvl5pPr algn="l">
-              <a:defRPr sz="1500" b="0">
-                <a:solidFill>
-                  <a:srgbClr val="161616"/>
-                </a:solidFill>
-                <a:latin typeface="Arial"/>
-                <a:ea typeface="Arial"/>
-                <a:cs typeface="Arial"/>
-              </a:defRPr>
-            </a:lvl5pPr>
-            <a:lvl6pPr algn="l">
-              <a:defRPr sz="1500" b="0">
-                <a:solidFill>
-                  <a:srgbClr val="161616"/>
-                </a:solidFill>
-                <a:latin typeface="Arial"/>
-                <a:ea typeface="Arial"/>
-                <a:cs typeface="Arial"/>
-              </a:defRPr>
-            </a:lvl6pPr>
-            <a:lvl7pPr algn="l">
-              <a:defRPr sz="1500" b="0">
-                <a:solidFill>
-                  <a:srgbClr val="161616"/>
-                </a:solidFill>
-                <a:latin typeface="Arial"/>
-                <a:ea typeface="Arial"/>
-                <a:cs typeface="Arial"/>
-              </a:defRPr>
-            </a:lvl7pPr>
-            <a:lvl8pPr algn="l">
-              <a:defRPr sz="1500" b="0">
-                <a:solidFill>
-                  <a:srgbClr val="161616"/>
-                </a:solidFill>
-                <a:latin typeface="Arial"/>
-                <a:ea typeface="Arial"/>
-                <a:cs typeface="Arial"/>
-              </a:defRPr>
-            </a:lvl8pPr>
-            <a:lvl9pPr algn="l">
-              <a:defRPr sz="1500" b="0">
-                <a:solidFill>
-                  <a:srgbClr val="161616"/>
-                </a:solidFill>
-                <a:latin typeface="Arial"/>
-                <a:ea typeface="Arial"/>
-                <a:cs typeface="Arial"/>
-              </a:defRPr>
-            </a:lvl9pPr>
-          </a:lstStyle>
-          <a:p xmlns:a="http://schemas.openxmlformats.org/drawingml/2006/main">
-            <a:pPr algn="l">
-              <a:defRPr sz="1500" b="0">
-                <a:solidFill>
-                  <a:srgbClr val="161616"/>
-                </a:solidFill>
-                <a:latin typeface="Arial"/>
-                <a:ea typeface="Arial"/>
-                <a:cs typeface="Arial"/>
-              </a:defRPr>
-            </a:pPr>
-            <a:r>
-              <a:rPr sz="1500" b="0">
-                <a:solidFill>
-                  <a:srgbClr val="161616"/>
-                </a:solidFill>
-                <a:latin typeface="Arial"/>
-                <a:ea typeface="Arial"/>
-                <a:cs typeface="Arial"/>
-              </a:rPr>
-              <a:t>They add operations and depth, increasing noise exposure.</a:t>
-            </a:r>
-          </a:p>
-        </p:txBody>
-      </p:sp>
-      <p:sp>
-        <p:nvSpPr>
-          <p:cNvPr id="9" name="">
-            <a:extLst xmlns:a="http://schemas.openxmlformats.org/drawingml/2006/main">
-              <a:ext uri="{FF2B5EF4-FFF2-40B4-BE49-F238E27FC236}">
-                <a16:creationId xmlns:a16="http://schemas.microsoft.com/office/drawing/2014/main" id="{B687105B-4C6B-4E8E-9CB0-6B230CEFFAA2}"/>
-              </a:ext>
-            </a:extLst>
-          </p:cNvPr>
-          <p:cNvSpPr>
-            <a:spLocks xmlns:a="http://schemas.openxmlformats.org/drawingml/2006/main" noGrp="1"/>
-          </p:cNvSpPr>
-          <p:nvPr/>
-        </p:nvSpPr>
-        <p:spPr>
-          <a:xfrm xmlns:a="http://schemas.openxmlformats.org/drawingml/2006/main">
-            <a:off x="6305550" y="3048000"/>
-            <a:ext cx="5143500" cy="323850"/>
-          </a:xfrm>
-          <a:prstGeom xmlns:a="http://schemas.openxmlformats.org/drawingml/2006/main" prst="rect">
-            <a:avLst/>
-          </a:prstGeom>
-          <a:noFill xmlns:a="http://schemas.openxmlformats.org/drawingml/2006/main"/>
-          <a:ln xmlns:a="http://schemas.openxmlformats.org/drawingml/2006/main" w="0">
-            <a:noFill/>
-            <a:prstDash val="solid"/>
-          </a:ln>
-        </p:spPr>
-        <p:txBody>
-          <a:bodyPr xmlns:a="http://schemas.openxmlformats.org/drawingml/2006/main" wrap="square" lIns="0" tIns="0" rIns="0" bIns="0" anchor="t">
-            <a:normAutofit fontScale="100000"/>
-          </a:bodyPr>
-          <a:lstStyle xmlns:a="http://schemas.openxmlformats.org/drawingml/2006/main">
-            <a:defPPr algn="l">
-              <a:defRPr sz="1425" b="1">
-                <a:solidFill>
-                  <a:srgbClr val="009D9A"/>
-                </a:solidFill>
-                <a:latin typeface="Arial"/>
-                <a:ea typeface="Arial"/>
-                <a:cs typeface="Arial"/>
-              </a:defRPr>
-            </a:defPPr>
-            <a:lvl1pPr algn="l">
-              <a:defRPr sz="1425" b="1">
-                <a:solidFill>
-                  <a:srgbClr val="009D9A"/>
-                </a:solidFill>
-                <a:latin typeface="Arial"/>
-                <a:ea typeface="Arial"/>
-                <a:cs typeface="Arial"/>
-              </a:defRPr>
-            </a:lvl1pPr>
-            <a:lvl2pPr algn="l">
-              <a:defRPr sz="1425" b="1">
-                <a:solidFill>
-                  <a:srgbClr val="009D9A"/>
-                </a:solidFill>
-                <a:latin typeface="Arial"/>
-                <a:ea typeface="Arial"/>
-                <a:cs typeface="Arial"/>
-              </a:defRPr>
-            </a:lvl2pPr>
-            <a:lvl3pPr algn="l">
-              <a:defRPr sz="1425" b="1">
-                <a:solidFill>
-                  <a:srgbClr val="009D9A"/>
-                </a:solidFill>
-                <a:latin typeface="Arial"/>
-                <a:ea typeface="Arial"/>
-                <a:cs typeface="Arial"/>
-              </a:defRPr>
-            </a:lvl3pPr>
-            <a:lvl4pPr algn="l">
-              <a:defRPr sz="1425" b="1">
-                <a:solidFill>
-                  <a:srgbClr val="009D9A"/>
-                </a:solidFill>
-                <a:latin typeface="Arial"/>
-                <a:ea typeface="Arial"/>
-                <a:cs typeface="Arial"/>
-              </a:defRPr>
-            </a:lvl4pPr>
-            <a:lvl5pPr algn="l">
-              <a:defRPr sz="1425" b="1">
-                <a:solidFill>
-                  <a:srgbClr val="009D9A"/>
-                </a:solidFill>
-                <a:latin typeface="Arial"/>
-                <a:ea typeface="Arial"/>
-                <a:cs typeface="Arial"/>
-              </a:defRPr>
-            </a:lvl5pPr>
-            <a:lvl6pPr algn="l">
-              <a:defRPr sz="1425" b="1">
-                <a:solidFill>
-                  <a:srgbClr val="009D9A"/>
-                </a:solidFill>
-                <a:latin typeface="Arial"/>
-                <a:ea typeface="Arial"/>
-                <a:cs typeface="Arial"/>
-              </a:defRPr>
-            </a:lvl6pPr>
-            <a:lvl7pPr algn="l">
-              <a:defRPr sz="1425" b="1">
-                <a:solidFill>
-                  <a:srgbClr val="009D9A"/>
-                </a:solidFill>
-                <a:latin typeface="Arial"/>
-                <a:ea typeface="Arial"/>
-                <a:cs typeface="Arial"/>
-              </a:defRPr>
-            </a:lvl7pPr>
-            <a:lvl8pPr algn="l">
-              <a:defRPr sz="1425" b="1">
-                <a:solidFill>
-                  <a:srgbClr val="009D9A"/>
-                </a:solidFill>
-                <a:latin typeface="Arial"/>
-                <a:ea typeface="Arial"/>
-                <a:cs typeface="Arial"/>
-              </a:defRPr>
-            </a:lvl8pPr>
-            <a:lvl9pPr algn="l">
-              <a:defRPr sz="1425" b="1">
-                <a:solidFill>
-                  <a:srgbClr val="009D9A"/>
-                </a:solidFill>
-                <a:latin typeface="Arial"/>
-                <a:ea typeface="Arial"/>
-                <a:cs typeface="Arial"/>
-              </a:defRPr>
-            </a:lvl9pPr>
-          </a:lstStyle>
-          <a:p xmlns:a="http://schemas.openxmlformats.org/drawingml/2006/main">
-            <a:pPr algn="l">
-              <a:defRPr sz="1425" b="1">
-                <a:solidFill>
-                  <a:srgbClr val="009D9A"/>
-                </a:solidFill>
-                <a:latin typeface="Arial"/>
-                <a:ea typeface="Arial"/>
-                <a:cs typeface="Arial"/>
-              </a:defRPr>
-            </a:pPr>
-            <a:r>
-              <a:rPr sz="1425" b="1">
-                <a:solidFill>
-                  <a:srgbClr val="009D9A"/>
-                </a:solidFill>
-                <a:latin typeface="Arial"/>
-                <a:ea typeface="Arial"/>
-                <a:cs typeface="Arial"/>
-              </a:rPr>
-              <a:t>Does span cause the fidelity change?</a:t>
-            </a:r>
-          </a:p>
-        </p:txBody>
-      </p:sp>
-      <p:sp>
-        <p:nvSpPr>
-          <p:cNvPr id="10" name="">
-            <a:extLst xmlns:a="http://schemas.openxmlformats.org/drawingml/2006/main">
-              <a:ext uri="{FF2B5EF4-FFF2-40B4-BE49-F238E27FC236}">
-                <a16:creationId xmlns:a16="http://schemas.microsoft.com/office/drawing/2014/main" id="{CEE749A7-02BD-48BF-8487-0720D47C3DEA}"/>
-              </a:ext>
-            </a:extLst>
-          </p:cNvPr>
-          <p:cNvSpPr>
-            <a:spLocks xmlns:a="http://schemas.openxmlformats.org/drawingml/2006/main" noGrp="1"/>
-          </p:cNvSpPr>
-          <p:nvPr/>
-        </p:nvSpPr>
-        <p:spPr>
-          <a:xfrm xmlns:a="http://schemas.openxmlformats.org/drawingml/2006/main">
-            <a:off x="6305550" y="3457575"/>
-            <a:ext cx="5095875" cy="714375"/>
-          </a:xfrm>
-          <a:prstGeom xmlns:a="http://schemas.openxmlformats.org/drawingml/2006/main" prst="rect">
-            <a:avLst/>
-          </a:prstGeom>
-          <a:noFill xmlns:a="http://schemas.openxmlformats.org/drawingml/2006/main"/>
-          <a:ln xmlns:a="http://schemas.openxmlformats.org/drawingml/2006/main" w="0">
-            <a:noFill/>
-            <a:prstDash val="solid"/>
-          </a:ln>
-        </p:spPr>
-        <p:txBody>
-          <a:bodyPr xmlns:a="http://schemas.openxmlformats.org/drawingml/2006/main" wrap="square" lIns="0" tIns="0" rIns="0" bIns="0" anchor="t">
-            <a:normAutofit fontScale="100000"/>
-          </a:bodyPr>
-          <a:lstStyle xmlns:a="http://schemas.openxmlformats.org/drawingml/2006/main">
-            <a:defPPr algn="l">
-              <a:defRPr sz="1500" b="0">
-                <a:solidFill>
-                  <a:srgbClr val="161616"/>
-                </a:solidFill>
-                <a:latin typeface="Arial"/>
-                <a:ea typeface="Arial"/>
-                <a:cs typeface="Arial"/>
-              </a:defRPr>
-            </a:defPPr>
-            <a:lvl1pPr algn="l">
-              <a:defRPr sz="1500" b="0">
-                <a:solidFill>
-                  <a:srgbClr val="161616"/>
-                </a:solidFill>
-                <a:latin typeface="Arial"/>
-                <a:ea typeface="Arial"/>
-                <a:cs typeface="Arial"/>
-              </a:defRPr>
-            </a:lvl1pPr>
-            <a:lvl2pPr algn="l">
-              <a:defRPr sz="1500" b="0">
-                <a:solidFill>
-                  <a:srgbClr val="161616"/>
-                </a:solidFill>
-                <a:latin typeface="Arial"/>
-                <a:ea typeface="Arial"/>
-                <a:cs typeface="Arial"/>
-              </a:defRPr>
-            </a:lvl2pPr>
-            <a:lvl3pPr algn="l">
-              <a:defRPr sz="1500" b="0">
-                <a:solidFill>
-                  <a:srgbClr val="161616"/>
-                </a:solidFill>
-                <a:latin typeface="Arial"/>
-                <a:ea typeface="Arial"/>
-                <a:cs typeface="Arial"/>
-              </a:defRPr>
-            </a:lvl3pPr>
-            <a:lvl4pPr algn="l">
-              <a:defRPr sz="1500" b="0">
-                <a:solidFill>
-                  <a:srgbClr val="161616"/>
-                </a:solidFill>
-                <a:latin typeface="Arial"/>
-                <a:ea typeface="Arial"/>
-                <a:cs typeface="Arial"/>
-              </a:defRPr>
-            </a:lvl4pPr>
-            <a:lvl5pPr algn="l">
-              <a:defRPr sz="1500" b="0">
-                <a:solidFill>
-                  <a:srgbClr val="161616"/>
-                </a:solidFill>
-                <a:latin typeface="Arial"/>
-                <a:ea typeface="Arial"/>
-                <a:cs typeface="Arial"/>
-              </a:defRPr>
-            </a:lvl5pPr>
-            <a:lvl6pPr algn="l">
-              <a:defRPr sz="1500" b="0">
-                <a:solidFill>
-                  <a:srgbClr val="161616"/>
-                </a:solidFill>
-                <a:latin typeface="Arial"/>
-                <a:ea typeface="Arial"/>
-                <a:cs typeface="Arial"/>
-              </a:defRPr>
-            </a:lvl6pPr>
-            <a:lvl7pPr algn="l">
-              <a:defRPr sz="1500" b="0">
-                <a:solidFill>
-                  <a:srgbClr val="161616"/>
-                </a:solidFill>
-                <a:latin typeface="Arial"/>
-                <a:ea typeface="Arial"/>
-                <a:cs typeface="Arial"/>
-              </a:defRPr>
-            </a:lvl7pPr>
-            <a:lvl8pPr algn="l">
-              <a:defRPr sz="1500" b="0">
-                <a:solidFill>
-                  <a:srgbClr val="161616"/>
-                </a:solidFill>
-                <a:latin typeface="Arial"/>
-                <a:ea typeface="Arial"/>
-                <a:cs typeface="Arial"/>
-              </a:defRPr>
-            </a:lvl8pPr>
-            <a:lvl9pPr algn="l">
-              <a:defRPr sz="1500" b="0">
-                <a:solidFill>
-                  <a:srgbClr val="161616"/>
-                </a:solidFill>
-                <a:latin typeface="Arial"/>
-                <a:ea typeface="Arial"/>
-                <a:cs typeface="Arial"/>
-              </a:defRPr>
-            </a:lvl9pPr>
-          </a:lstStyle>
-          <a:p xmlns:a="http://schemas.openxmlformats.org/drawingml/2006/main">
-            <a:pPr algn="l">
-              <a:defRPr sz="1500" b="0">
-                <a:solidFill>
-                  <a:srgbClr val="161616"/>
-                </a:solidFill>
-                <a:latin typeface="Arial"/>
-                <a:ea typeface="Arial"/>
-                <a:cs typeface="Arial"/>
-              </a:defRPr>
-            </a:pPr>
-            <a:r>
-              <a:rPr sz="1500" b="0">
-                <a:solidFill>
-                  <a:srgbClr val="161616"/>
-                </a:solidFill>
-                <a:latin typeface="Arial"/>
-                <a:ea typeface="Arial"/>
-                <a:cs typeface="Arial"/>
-              </a:rPr>
-              <a:t>Not established. Check support and overhead also varied.</a:t>
-            </a:r>
-          </a:p>
-        </p:txBody>
-      </p:sp>
-      <p:sp>
-        <p:nvSpPr>
-          <p:cNvPr id="11" name="">
-            <a:extLst xmlns:a="http://schemas.openxmlformats.org/drawingml/2006/main">
-              <a:ext uri="{FF2B5EF4-FFF2-40B4-BE49-F238E27FC236}">
-                <a16:creationId xmlns:a16="http://schemas.microsoft.com/office/drawing/2014/main" id="{40C43A3F-3573-47BD-85E6-EBB4AAD24221}"/>
-              </a:ext>
-            </a:extLst>
-          </p:cNvPr>
-          <p:cNvSpPr>
-            <a:spLocks xmlns:a="http://schemas.openxmlformats.org/drawingml/2006/main" noGrp="1"/>
-          </p:cNvSpPr>
-          <p:nvPr/>
-        </p:nvSpPr>
-        <p:spPr>
-          <a:xfrm xmlns:a="http://schemas.openxmlformats.org/drawingml/2006/main">
-            <a:off x="685800" y="4429125"/>
-            <a:ext cx="5143500" cy="323850"/>
-          </a:xfrm>
-          <a:prstGeom xmlns:a="http://schemas.openxmlformats.org/drawingml/2006/main" prst="rect">
-            <a:avLst/>
-          </a:prstGeom>
-          <a:noFill xmlns:a="http://schemas.openxmlformats.org/drawingml/2006/main"/>
-          <a:ln xmlns:a="http://schemas.openxmlformats.org/drawingml/2006/main" w="0">
-            <a:noFill/>
-            <a:prstDash val="solid"/>
-          </a:ln>
-        </p:spPr>
-        <p:txBody>
-          <a:bodyPr xmlns:a="http://schemas.openxmlformats.org/drawingml/2006/main" wrap="square" lIns="0" tIns="0" rIns="0" bIns="0" anchor="t">
-            <a:normAutofit fontScale="100000"/>
-          </a:bodyPr>
-          <a:lstStyle xmlns:a="http://schemas.openxmlformats.org/drawingml/2006/main">
-            <a:defPPr algn="l">
-              <a:defRPr sz="1425" b="1">
-                <a:solidFill>
-                  <a:srgbClr val="0F62FE"/>
-                </a:solidFill>
-                <a:latin typeface="Arial"/>
-                <a:ea typeface="Arial"/>
-                <a:cs typeface="Arial"/>
-              </a:defRPr>
-            </a:defPPr>
-            <a:lvl1pPr algn="l">
-              <a:defRPr sz="1425" b="1">
-                <a:solidFill>
-                  <a:srgbClr val="0F62FE"/>
-                </a:solidFill>
-                <a:latin typeface="Arial"/>
-                <a:ea typeface="Arial"/>
-                <a:cs typeface="Arial"/>
-              </a:defRPr>
-            </a:lvl1pPr>
-            <a:lvl2pPr algn="l">
-              <a:defRPr sz="1425" b="1">
-                <a:solidFill>
-                  <a:srgbClr val="0F62FE"/>
-                </a:solidFill>
-                <a:latin typeface="Arial"/>
-                <a:ea typeface="Arial"/>
-                <a:cs typeface="Arial"/>
-              </a:defRPr>
-            </a:lvl2pPr>
-            <a:lvl3pPr algn="l">
-              <a:defRPr sz="1425" b="1">
-                <a:solidFill>
-                  <a:srgbClr val="0F62FE"/>
-                </a:solidFill>
-                <a:latin typeface="Arial"/>
-                <a:ea typeface="Arial"/>
-                <a:cs typeface="Arial"/>
-              </a:defRPr>
-            </a:lvl3pPr>
-            <a:lvl4pPr algn="l">
-              <a:defRPr sz="1425" b="1">
-                <a:solidFill>
-                  <a:srgbClr val="0F62FE"/>
-                </a:solidFill>
-                <a:latin typeface="Arial"/>
-                <a:ea typeface="Arial"/>
-                <a:cs typeface="Arial"/>
-              </a:defRPr>
-            </a:lvl4pPr>
-            <a:lvl5pPr algn="l">
-              <a:defRPr sz="1425" b="1">
-                <a:solidFill>
-                  <a:srgbClr val="0F62FE"/>
-                </a:solidFill>
-                <a:latin typeface="Arial"/>
-                <a:ea typeface="Arial"/>
-                <a:cs typeface="Arial"/>
-              </a:defRPr>
-            </a:lvl5pPr>
-            <a:lvl6pPr algn="l">
-              <a:defRPr sz="1425" b="1">
-                <a:solidFill>
-                  <a:srgbClr val="0F62FE"/>
-                </a:solidFill>
-                <a:latin typeface="Arial"/>
-                <a:ea typeface="Arial"/>
-                <a:cs typeface="Arial"/>
-              </a:defRPr>
-            </a:lvl6pPr>
-            <a:lvl7pPr algn="l">
-              <a:defRPr sz="1425" b="1">
-                <a:solidFill>
-                  <a:srgbClr val="0F62FE"/>
-                </a:solidFill>
-                <a:latin typeface="Arial"/>
-                <a:ea typeface="Arial"/>
-                <a:cs typeface="Arial"/>
-              </a:defRPr>
-            </a:lvl7pPr>
-            <a:lvl8pPr algn="l">
-              <a:defRPr sz="1425" b="1">
-                <a:solidFill>
-                  <a:srgbClr val="0F62FE"/>
-                </a:solidFill>
-                <a:latin typeface="Arial"/>
-                <a:ea typeface="Arial"/>
-                <a:cs typeface="Arial"/>
-              </a:defRPr>
-            </a:lvl8pPr>
-            <a:lvl9pPr algn="l">
-              <a:defRPr sz="1425" b="1">
-                <a:solidFill>
-                  <a:srgbClr val="0F62FE"/>
-                </a:solidFill>
-                <a:latin typeface="Arial"/>
-                <a:ea typeface="Arial"/>
-                <a:cs typeface="Arial"/>
-              </a:defRPr>
-            </a:lvl9pPr>
-          </a:lstStyle>
-          <a:p xmlns:a="http://schemas.openxmlformats.org/drawingml/2006/main">
-            <a:pPr algn="l">
-              <a:defRPr sz="1425" b="1">
-                <a:solidFill>
-                  <a:srgbClr val="0F62FE"/>
-                </a:solidFill>
-                <a:latin typeface="Arial"/>
-                <a:ea typeface="Arial"/>
-                <a:cs typeface="Arial"/>
-              </a:defRPr>
-            </a:pPr>
-            <a:r>
-              <a:rPr sz="1425" b="1">
-                <a:solidFill>
-                  <a:srgbClr val="0F62FE"/>
-                </a:solidFill>
-                <a:latin typeface="Arial"/>
-                <a:ea typeface="Arial"/>
-                <a:cs typeface="Arial"/>
-              </a:rPr>
-              <a:t>Why no Paulice checks on the T circuit?</a:t>
-            </a:r>
-          </a:p>
-        </p:txBody>
-      </p:sp>
-      <p:sp>
-        <p:nvSpPr>
-          <p:cNvPr id="12" name="">
-            <a:extLst xmlns:a="http://schemas.openxmlformats.org/drawingml/2006/main">
-              <a:ext uri="{FF2B5EF4-FFF2-40B4-BE49-F238E27FC236}">
-                <a16:creationId xmlns:a16="http://schemas.microsoft.com/office/drawing/2014/main" id="{44F70716-242D-43B9-8066-3AAE734D2BCA}"/>
-              </a:ext>
-            </a:extLst>
-          </p:cNvPr>
-          <p:cNvSpPr>
-            <a:spLocks xmlns:a="http://schemas.openxmlformats.org/drawingml/2006/main" noGrp="1"/>
-          </p:cNvSpPr>
-          <p:nvPr/>
-        </p:nvSpPr>
-        <p:spPr>
-          <a:xfrm xmlns:a="http://schemas.openxmlformats.org/drawingml/2006/main">
-            <a:off x="685800" y="4838700"/>
-            <a:ext cx="5095875" cy="714375"/>
-          </a:xfrm>
-          <a:prstGeom xmlns:a="http://schemas.openxmlformats.org/drawingml/2006/main" prst="rect">
-            <a:avLst/>
-          </a:prstGeom>
-          <a:noFill xmlns:a="http://schemas.openxmlformats.org/drawingml/2006/main"/>
-          <a:ln xmlns:a="http://schemas.openxmlformats.org/drawingml/2006/main" w="0">
-            <a:noFill/>
-            <a:prstDash val="solid"/>
-          </a:ln>
-        </p:spPr>
-        <p:txBody>
-          <a:bodyPr xmlns:a="http://schemas.openxmlformats.org/drawingml/2006/main" wrap="square" lIns="0" tIns="0" rIns="0" bIns="0" anchor="t">
-            <a:normAutofit fontScale="100000"/>
-          </a:bodyPr>
-          <a:lstStyle xmlns:a="http://schemas.openxmlformats.org/drawingml/2006/main">
-            <a:defPPr algn="l">
-              <a:defRPr sz="1500" b="0">
-                <a:solidFill>
-                  <a:srgbClr val="161616"/>
-                </a:solidFill>
-                <a:latin typeface="Arial"/>
-                <a:ea typeface="Arial"/>
-                <a:cs typeface="Arial"/>
-              </a:defRPr>
-            </a:defPPr>
-            <a:lvl1pPr algn="l">
-              <a:defRPr sz="1500" b="0">
-                <a:solidFill>
-                  <a:srgbClr val="161616"/>
-                </a:solidFill>
-                <a:latin typeface="Arial"/>
-                <a:ea typeface="Arial"/>
-                <a:cs typeface="Arial"/>
-              </a:defRPr>
-            </a:lvl1pPr>
-            <a:lvl2pPr algn="l">
-              <a:defRPr sz="1500" b="0">
-                <a:solidFill>
-                  <a:srgbClr val="161616"/>
-                </a:solidFill>
-                <a:latin typeface="Arial"/>
-                <a:ea typeface="Arial"/>
-                <a:cs typeface="Arial"/>
-              </a:defRPr>
-            </a:lvl2pPr>
-            <a:lvl3pPr algn="l">
-              <a:defRPr sz="1500" b="0">
-                <a:solidFill>
-                  <a:srgbClr val="161616"/>
-                </a:solidFill>
-                <a:latin typeface="Arial"/>
-                <a:ea typeface="Arial"/>
-                <a:cs typeface="Arial"/>
-              </a:defRPr>
-            </a:lvl3pPr>
-            <a:lvl4pPr algn="l">
-              <a:defRPr sz="1500" b="0">
-                <a:solidFill>
-                  <a:srgbClr val="161616"/>
-                </a:solidFill>
-                <a:latin typeface="Arial"/>
-                <a:ea typeface="Arial"/>
-                <a:cs typeface="Arial"/>
-              </a:defRPr>
-            </a:lvl4pPr>
-            <a:lvl5pPr algn="l">
-              <a:defRPr sz="1500" b="0">
-                <a:solidFill>
-                  <a:srgbClr val="161616"/>
-                </a:solidFill>
-                <a:latin typeface="Arial"/>
-                <a:ea typeface="Arial"/>
-                <a:cs typeface="Arial"/>
-              </a:defRPr>
-            </a:lvl5pPr>
-            <a:lvl6pPr algn="l">
-              <a:defRPr sz="1500" b="0">
-                <a:solidFill>
-                  <a:srgbClr val="161616"/>
-                </a:solidFill>
-                <a:latin typeface="Arial"/>
-                <a:ea typeface="Arial"/>
-                <a:cs typeface="Arial"/>
-              </a:defRPr>
-            </a:lvl6pPr>
-            <a:lvl7pPr algn="l">
-              <a:defRPr sz="1500" b="0">
-                <a:solidFill>
-                  <a:srgbClr val="161616"/>
-                </a:solidFill>
-                <a:latin typeface="Arial"/>
-                <a:ea typeface="Arial"/>
-                <a:cs typeface="Arial"/>
-              </a:defRPr>
-            </a:lvl7pPr>
-            <a:lvl8pPr algn="l">
-              <a:defRPr sz="1500" b="0">
-                <a:solidFill>
-                  <a:srgbClr val="161616"/>
-                </a:solidFill>
-                <a:latin typeface="Arial"/>
-                <a:ea typeface="Arial"/>
-                <a:cs typeface="Arial"/>
-              </a:defRPr>
-            </a:lvl8pPr>
-            <a:lvl9pPr algn="l">
-              <a:defRPr sz="1500" b="0">
-                <a:solidFill>
-                  <a:srgbClr val="161616"/>
-                </a:solidFill>
-                <a:latin typeface="Arial"/>
-                <a:ea typeface="Arial"/>
-                <a:cs typeface="Arial"/>
-              </a:defRPr>
-            </a:lvl9pPr>
-          </a:lstStyle>
-          <a:p xmlns:a="http://schemas.openxmlformats.org/drawingml/2006/main">
-            <a:pPr algn="l">
-              <a:defRPr sz="1500" b="0">
-                <a:solidFill>
-                  <a:srgbClr val="161616"/>
-                </a:solidFill>
-                <a:latin typeface="Arial"/>
-                <a:ea typeface="Arial"/>
-                <a:cs typeface="Arial"/>
-              </a:defRPr>
-            </a:pPr>
-            <a:r>
-              <a:rPr sz="1500" b="0">
-                <a:solidFill>
-                  <a:srgbClr val="161616"/>
-                </a:solidFill>
-                <a:latin typeface="Arial"/>
-                <a:ea typeface="Arial"/>
-                <a:cs typeface="Arial"/>
-              </a:rPr>
-              <a:t>The documented workflow is Clifford-focused; non-Clifford support is future work.</a:t>
-            </a:r>
-          </a:p>
-        </p:txBody>
-      </p:sp>
-    </p:spTree>
-    <p:extLst>
-      <p:ext uri="{BB962C8B-B14F-4D97-AF65-F5344CB8AC3E}">
-        <p14:creationId xmlns:p14="http://schemas.microsoft.com/office/powerpoint/2010/main" val="1110237123"/>
-      </p:ext>
-    </p:extLst>
-  </p:cSld>
-</p:sld>
-</file>
-
 <file path=ppt/slides/slide3.xml><?xml version="1.0" encoding="utf-8"?>
 <p:sld xmlns:p="http://schemas.openxmlformats.org/presentationml/2006/main">
   <p:cSld>

--- a/presentation/Tracks 1 and 2 combined.pptx
+++ b/presentation/Tracks 1 and 2 combined.pptx
@@ -9,14 +9,6 @@
   </p:notesMasterIdLst>
   <p:sldIdLst>
     <p:sldId id="256" r:id="R6644a5e0abdd4993"/>
-    <p:sldId id="257" r:id="R2b49de4ed3974336"/>
-    <p:sldId id="258" r:id="R222ab5b821464866"/>
-    <p:sldId id="259" r:id="Rc1ff0d8c6f6c4141"/>
-    <p:sldId id="260" r:id="Re2876851bf224e3a"/>
-    <p:sldId id="261" r:id="R408fc55328c24fd7"/>
-    <p:sldId id="262" r:id="Rda98bba712c84a4e"/>
-    <p:sldId id="263" r:id="R0b250530cbc84e7b"/>
-    <p:sldId id="264" r:id="R00b482d1d9f8439a"/>
     <p:sldId id="265" r:id="R63d7ace361274741"/>
     <p:sldId id="266" r:id="R92cfed7235b14214"/>
     <p:sldId id="267" r:id="R6859061ee45f4025"/>
@@ -30,6 +22,14 @@
     <p:sldId id="275" r:id="Re8d503f2fa254849"/>
     <p:sldId id="276" r:id="R38bd92a6652641e2"/>
     <p:sldId id="277" r:id="R43f1c12f466a4d45"/>
+    <p:sldId id="257" r:id="R2b49de4ed3974336"/>
+    <p:sldId id="258" r:id="R222ab5b821464866"/>
+    <p:sldId id="259" r:id="Rc1ff0d8c6f6c4141"/>
+    <p:sldId id="260" r:id="Re2876851bf224e3a"/>
+    <p:sldId id="261" r:id="R408fc55328c24fd7"/>
+    <p:sldId id="262" r:id="Rda98bba712c84a4e"/>
+    <p:sldId id="263" r:id="R0b250530cbc84e7b"/>
+    <p:sldId id="264" r:id="R00b482d1d9f8439a"/>
   </p:sldIdLst>
   <p:sldSz cx="12192000" cy="6858000"/>
   <p:notesSz cx="6858000" cy="9144000"/>
@@ -30767,7 +30767,7 @@
                 <a:ea typeface="Arial"/>
                 <a:cs typeface="Arial"/>
               </a:rPr>
-              <a:t>How the tools fit together</a:t>
+              <a:t>Track 2 procedure</a:t>
             </a:r>
           </a:p>
         </p:txBody>
@@ -30926,7 +30926,7 @@
                 <a:ea typeface="Arial"/>
                 <a:cs typeface="Arial"/>
               </a:rPr>
-              <a:t>1  Estimate errors</a:t>
+              <a:t>1  Simulate</a:t>
             </a:r>
           </a:p>
         </p:txBody>
@@ -31085,7 +31085,7 @@
                 <a:ea typeface="Arial"/>
                 <a:cs typeface="Arial"/>
               </a:rPr>
-              <a:t>Use a known, simulated calibration model for this local experiment.</a:t>
+              <a:t>Aer simulates ideal and three noise levels; Estimator reads center-X.</a:t>
             </a:r>
           </a:p>
         </p:txBody>
@@ -31244,7 +31244,7 @@
                 <a:ea typeface="Arial"/>
                 <a:cs typeface="Arial"/>
               </a:rPr>
-              <a:t>2  Focus the work</a:t>
+              <a:t>2  SLC selects</a:t>
             </a:r>
           </a:p>
         </p:txBody>
@@ -31403,7 +31403,7 @@
                 <a:ea typeface="Arial"/>
                 <a:cs typeface="Arial"/>
               </a:rPr>
-              <a:t>SLC ranks errors by how much they can affect the chosen measurement.</a:t>
+              <a:t>SLC ranks Pauli errors by center-X impact; keep bias below 0.05.</a:t>
             </a:r>
           </a:p>
         </p:txBody>
@@ -31562,7 +31562,7 @@
                 <a:ea typeface="Arial"/>
                 <a:cs typeface="Arial"/>
               </a:rPr>
-              <a:t>3  Correct the result</a:t>
+              <a:t>3  Correct with PNA</a:t>
             </a:r>
           </a:p>
         </p:txBody>
@@ -31721,7 +31721,7 @@
                 <a:ea typeface="Arial"/>
                 <a:cs typeface="Arial"/>
               </a:rPr>
-              <a:t>PNA folds the modeled correction into the measured quantity.</a:t>
+              <a:t>Compare full and SLC models on center-X, fidelity, and setup time.</a:t>
             </a:r>
           </a:p>
         </p:txBody>
